--- a/05-truthful-algorithms/slides.pptx
+++ b/05-truthful-algorithms/slides.pptx
@@ -4588,7 +4588,7 @@
           <a:p>
             <a:fld id="{9541D46A-832C-4F80-9F62-B41DDDCBCD1A}" type="datetimeFigureOut">
               <a:rPr lang="he-IL" smtClean="0"/>
-              <a:t>י"ג/אייר/תשפ"ה</a:t>
+              <a:t>ד'/כסלו/תשפ"ו</a:t>
             </a:fld>
             <a:endParaRPr lang="he-IL"/>
           </a:p>
@@ -4787,7 +4787,7 @@
           <a:p>
             <a:fld id="{9541D46A-832C-4F80-9F62-B41DDDCBCD1A}" type="datetimeFigureOut">
               <a:rPr lang="he-IL" smtClean="0"/>
-              <a:t>י"ג/אייר/תשפ"ה</a:t>
+              <a:t>ד'/כסלו/תשפ"ו</a:t>
             </a:fld>
             <a:endParaRPr lang="he-IL"/>
           </a:p>
@@ -5062,7 +5062,7 @@
           <a:p>
             <a:fld id="{9541D46A-832C-4F80-9F62-B41DDDCBCD1A}" type="datetimeFigureOut">
               <a:rPr lang="he-IL" smtClean="0"/>
-              <a:t>י"ג/אייר/תשפ"ה</a:t>
+              <a:t>ד'/כסלו/תשפ"ו</a:t>
             </a:fld>
             <a:endParaRPr lang="he-IL"/>
           </a:p>
@@ -5329,7 +5329,7 @@
           <a:p>
             <a:fld id="{9541D46A-832C-4F80-9F62-B41DDDCBCD1A}" type="datetimeFigureOut">
               <a:rPr lang="he-IL" smtClean="0"/>
-              <a:t>י"ג/אייר/תשפ"ה</a:t>
+              <a:t>ד'/כסלו/תשפ"ו</a:t>
             </a:fld>
             <a:endParaRPr lang="he-IL"/>
           </a:p>
@@ -5743,7 +5743,7 @@
           <a:p>
             <a:fld id="{9541D46A-832C-4F80-9F62-B41DDDCBCD1A}" type="datetimeFigureOut">
               <a:rPr lang="he-IL" smtClean="0"/>
-              <a:t>י"ג/אייר/תשפ"ה</a:t>
+              <a:t>ד'/כסלו/תשפ"ו</a:t>
             </a:fld>
             <a:endParaRPr lang="he-IL"/>
           </a:p>
@@ -5884,7 +5884,7 @@
           <a:p>
             <a:fld id="{9541D46A-832C-4F80-9F62-B41DDDCBCD1A}" type="datetimeFigureOut">
               <a:rPr lang="he-IL" smtClean="0"/>
-              <a:t>י"ג/אייר/תשפ"ה</a:t>
+              <a:t>ד'/כסלו/תשפ"ו</a:t>
             </a:fld>
             <a:endParaRPr lang="he-IL"/>
           </a:p>
@@ -5996,7 +5996,7 @@
           <a:p>
             <a:fld id="{9541D46A-832C-4F80-9F62-B41DDDCBCD1A}" type="datetimeFigureOut">
               <a:rPr lang="he-IL" smtClean="0"/>
-              <a:t>י"ג/אייר/תשפ"ה</a:t>
+              <a:t>ד'/כסלו/תשפ"ו</a:t>
             </a:fld>
             <a:endParaRPr lang="he-IL"/>
           </a:p>
@@ -6308,7 +6308,7 @@
           <a:p>
             <a:fld id="{9541D46A-832C-4F80-9F62-B41DDDCBCD1A}" type="datetimeFigureOut">
               <a:rPr lang="he-IL" smtClean="0"/>
-              <a:t>י"ג/אייר/תשפ"ה</a:t>
+              <a:t>ד'/כסלו/תשפ"ו</a:t>
             </a:fld>
             <a:endParaRPr lang="he-IL"/>
           </a:p>
@@ -6794,7 +6794,7 @@
           <a:p>
             <a:fld id="{9541D46A-832C-4F80-9F62-B41DDDCBCD1A}" type="datetimeFigureOut">
               <a:rPr lang="he-IL" smtClean="0"/>
-              <a:t>י"ג/אייר/תשפ"ה</a:t>
+              <a:t>ד'/כסלו/תשפ"ו</a:t>
             </a:fld>
             <a:endParaRPr lang="he-IL"/>
           </a:p>
@@ -6993,7 +6993,7 @@
           <a:p>
             <a:fld id="{9541D46A-832C-4F80-9F62-B41DDDCBCD1A}" type="datetimeFigureOut">
               <a:rPr lang="he-IL" smtClean="0"/>
-              <a:t>י"ג/אייר/תשפ"ה</a:t>
+              <a:t>ד'/כסלו/תשפ"ו</a:t>
             </a:fld>
             <a:endParaRPr lang="he-IL"/>
           </a:p>
@@ -7202,7 +7202,7 @@
           <a:p>
             <a:fld id="{9541D46A-832C-4F80-9F62-B41DDDCBCD1A}" type="datetimeFigureOut">
               <a:rPr lang="he-IL" smtClean="0"/>
-              <a:t>י"ג/אייר/תשפ"ה</a:t>
+              <a:t>ד'/כסלו/תשפ"ו</a:t>
             </a:fld>
             <a:endParaRPr lang="he-IL"/>
           </a:p>
@@ -7423,7 +7423,7 @@
           <a:p>
             <a:fld id="{A57208BD-929E-45E0-BE9A-A4B1924DBEC2}" type="datetimeFigureOut">
               <a:rPr lang="he-IL" smtClean="0"/>
-              <a:t>י"ג/אייר/תשפ"ה</a:t>
+              <a:t>ד'/כסלו/תשפ"ו</a:t>
             </a:fld>
             <a:endParaRPr lang="he-IL"/>
           </a:p>
@@ -7622,7 +7622,7 @@
           <a:p>
             <a:fld id="{A57208BD-929E-45E0-BE9A-A4B1924DBEC2}" type="datetimeFigureOut">
               <a:rPr lang="he-IL" smtClean="0"/>
-              <a:t>י"ג/אייר/תשפ"ה</a:t>
+              <a:t>ד'/כסלו/תשפ"ו</a:t>
             </a:fld>
             <a:endParaRPr lang="he-IL"/>
           </a:p>
@@ -7897,7 +7897,7 @@
           <a:p>
             <a:fld id="{A57208BD-929E-45E0-BE9A-A4B1924DBEC2}" type="datetimeFigureOut">
               <a:rPr lang="he-IL" smtClean="0"/>
-              <a:t>י"ג/אייר/תשפ"ה</a:t>
+              <a:t>ד'/כסלו/תשפ"ו</a:t>
             </a:fld>
             <a:endParaRPr lang="he-IL"/>
           </a:p>
@@ -8164,7 +8164,7 @@
           <a:p>
             <a:fld id="{A57208BD-929E-45E0-BE9A-A4B1924DBEC2}" type="datetimeFigureOut">
               <a:rPr lang="he-IL" smtClean="0"/>
-              <a:t>י"ג/אייר/תשפ"ה</a:t>
+              <a:t>ד'/כסלו/תשפ"ו</a:t>
             </a:fld>
             <a:endParaRPr lang="he-IL"/>
           </a:p>
@@ -8578,7 +8578,7 @@
           <a:p>
             <a:fld id="{A57208BD-929E-45E0-BE9A-A4B1924DBEC2}" type="datetimeFigureOut">
               <a:rPr lang="he-IL" smtClean="0"/>
-              <a:t>י"ג/אייר/תשפ"ה</a:t>
+              <a:t>ד'/כסלו/תשפ"ו</a:t>
             </a:fld>
             <a:endParaRPr lang="he-IL"/>
           </a:p>
@@ -8719,7 +8719,7 @@
           <a:p>
             <a:fld id="{A57208BD-929E-45E0-BE9A-A4B1924DBEC2}" type="datetimeFigureOut">
               <a:rPr lang="he-IL" smtClean="0"/>
-              <a:t>י"ג/אייר/תשפ"ה</a:t>
+              <a:t>ד'/כסלו/תשפ"ו</a:t>
             </a:fld>
             <a:endParaRPr lang="he-IL"/>
           </a:p>
@@ -8831,7 +8831,7 @@
           <a:p>
             <a:fld id="{A57208BD-929E-45E0-BE9A-A4B1924DBEC2}" type="datetimeFigureOut">
               <a:rPr lang="he-IL" smtClean="0"/>
-              <a:t>י"ג/אייר/תשפ"ה</a:t>
+              <a:t>ד'/כסלו/תשפ"ו</a:t>
             </a:fld>
             <a:endParaRPr lang="he-IL"/>
           </a:p>
@@ -9417,7 +9417,7 @@
           <a:p>
             <a:fld id="{A57208BD-929E-45E0-BE9A-A4B1924DBEC2}" type="datetimeFigureOut">
               <a:rPr lang="he-IL" smtClean="0"/>
-              <a:t>י"ג/אייר/תשפ"ה</a:t>
+              <a:t>ד'/כסלו/תשפ"ו</a:t>
             </a:fld>
             <a:endParaRPr lang="he-IL"/>
           </a:p>
@@ -9705,7 +9705,7 @@
           <a:p>
             <a:fld id="{A57208BD-929E-45E0-BE9A-A4B1924DBEC2}" type="datetimeFigureOut">
               <a:rPr lang="he-IL" smtClean="0"/>
-              <a:t>י"ג/אייר/תשפ"ה</a:t>
+              <a:t>ד'/כסלו/תשפ"ו</a:t>
             </a:fld>
             <a:endParaRPr lang="he-IL"/>
           </a:p>
@@ -9904,7 +9904,7 @@
           <a:p>
             <a:fld id="{A57208BD-929E-45E0-BE9A-A4B1924DBEC2}" type="datetimeFigureOut">
               <a:rPr lang="he-IL" smtClean="0"/>
-              <a:t>י"ג/אייר/תשפ"ה</a:t>
+              <a:t>ד'/כסלו/תשפ"ו</a:t>
             </a:fld>
             <a:endParaRPr lang="he-IL"/>
           </a:p>
@@ -10113,7 +10113,7 @@
           <a:p>
             <a:fld id="{A57208BD-929E-45E0-BE9A-A4B1924DBEC2}" type="datetimeFigureOut">
               <a:rPr lang="he-IL" smtClean="0"/>
-              <a:t>י"ג/אייר/תשפ"ה</a:t>
+              <a:t>ד'/כסלו/תשפ"ו</a:t>
             </a:fld>
             <a:endParaRPr lang="he-IL"/>
           </a:p>
@@ -12469,7 +12469,7 @@
           <a:p>
             <a:fld id="{9541D46A-832C-4F80-9F62-B41DDDCBCD1A}" type="datetimeFigureOut">
               <a:rPr lang="he-IL" smtClean="0"/>
-              <a:t>י"ג/אייר/תשפ"ה</a:t>
+              <a:t>ד'/כסלו/תשפ"ו</a:t>
             </a:fld>
             <a:endParaRPr lang="he-IL"/>
           </a:p>
@@ -13033,7 +13033,7 @@
           <a:p>
             <a:fld id="{A57208BD-929E-45E0-BE9A-A4B1924DBEC2}" type="datetimeFigureOut">
               <a:rPr lang="he-IL" smtClean="0"/>
-              <a:t>י"ג/אייר/תשפ"ה</a:t>
+              <a:t>ד'/כסלו/תשפ"ו</a:t>
             </a:fld>
             <a:endParaRPr lang="he-IL"/>
           </a:p>
